--- a/Day3_MixedModels_ModelSelection/FW536_Day3_Morning_mixed effects_nosoln_accessible.pptx
+++ b/Day3_MixedModels_ModelSelection/FW536_Day3_Morning_mixed effects_nosoln_accessible.pptx
@@ -26715,7 +26715,7 @@
             </a:pPr>
             <a:r>
               <a:rPr lang="en-US" altLang="en-US" sz="1400" b="1" dirty="0"/>
-              <a:t>Print(lm1$modelStruct)</a:t>
+              <a:t>print(lm2$modelStruct)</a:t>
             </a:r>
           </a:p>
         </p:txBody>

--- a/Day3_MixedModels_ModelSelection/FW536_Day3_Morning_mixed effects_nosoln_accessible.pptx
+++ b/Day3_MixedModels_ModelSelection/FW536_Day3_Morning_mixed effects_nosoln_accessible.pptx
@@ -29,6 +29,7 @@
     <p:sldId id="274" r:id="rId20"/>
     <p:sldId id="312" r:id="rId21"/>
     <p:sldId id="275" r:id="rId22"/>
+    <p:sldId id="276" r:id="rId23"/>
     <p:sldId id="277" r:id="rId24"/>
     <p:sldId id="278" r:id="rId25"/>
     <p:sldId id="280" r:id="rId26"/>
@@ -53,6 +54,7 @@
     <p:sldId id="329" r:id="rId45"/>
     <p:sldId id="330" r:id="rId46"/>
     <p:sldId id="331" r:id="rId47"/>
+    <p:sldId id="332" r:id="rId48"/>
     <p:sldId id="322" r:id="rId49"/>
     <p:sldId id="293" r:id="rId50"/>
     <p:sldId id="294" r:id="rId51"/>
@@ -65,6 +67,7 @@
     <p:sldId id="301" r:id="rId58"/>
     <p:sldId id="303" r:id="rId59"/>
     <p:sldId id="304" r:id="rId60"/>
+    <p:sldId id="305" r:id="rId61"/>
     <p:sldId id="306" r:id="rId62"/>
     <p:sldId id="307" r:id="rId63"/>
   </p:sldIdLst>
@@ -1629,6 +1632,95 @@
 </p:notes>
 </file>
 
+<file path=ppt/notesSlides/notesSlide20.xml><?xml version="1.0" encoding="utf-8"?>
+<p:notes xmlns:a="http://schemas.openxmlformats.org/drawingml/2006/main" xmlns:r="http://schemas.openxmlformats.org/officeDocument/2006/relationships" xmlns:p="http://schemas.openxmlformats.org/presentationml/2006/main">
+  <p:cSld>
+    <p:spTree>
+      <p:nvGrpSpPr>
+        <p:cNvPr id="1" name=""/>
+        <p:cNvGrpSpPr/>
+        <p:nvPr/>
+      </p:nvGrpSpPr>
+      <p:grpSpPr>
+        <a:xfrm>
+          <a:off x="0" y="0"/>
+          <a:ext cx="0" cy="0"/>
+          <a:chOff x="0" y="0"/>
+          <a:chExt cx="0" cy="0"/>
+        </a:xfrm>
+      </p:grpSpPr>
+      <p:sp>
+        <p:nvSpPr>
+          <p:cNvPr id="58370" name="Slide Image Placeholder 1"/>
+          <p:cNvSpPr>
+            <a:spLocks noGrp="1" noRot="1" noChangeAspect="1" noTextEdit="1"/>
+          </p:cNvSpPr>
+          <p:nvPr>
+            <p:ph type="sldImg"/>
+          </p:nvPr>
+        </p:nvSpPr>
+        <p:spPr>
+          <a:ln/>
+        </p:spPr>
+      </p:sp>
+      <p:sp>
+        <p:nvSpPr>
+          <p:cNvPr id="2" name="Notes Placeholder 2"/>
+          <p:cNvSpPr>
+            <a:spLocks noGrp="1"/>
+          </p:cNvSpPr>
+          <p:nvPr>
+            <p:ph type="body" idx="1"/>
+          </p:nvPr>
+        </p:nvSpPr>
+        <p:spPr>
+          <a:noFill/>
+          <a:extLst>
+            <a:ext uri="{909E8E84-426E-40DD-AFC4-6F175D3DCCD1}">
+              <a14:hiddenFill xmlns:a14="http://schemas.microsoft.com/office/drawing/2010/main">
+                <a:solidFill>
+                  <a:srgbClr val="FFFFFF"/>
+                </a:solidFill>
+              </a14:hiddenFill>
+            </a:ext>
+            <a:ext uri="{91240B29-F687-4F45-9708-019B960494DF}">
+              <a14:hiddenLine xmlns:a14="http://schemas.microsoft.com/office/drawing/2010/main" w="9525">
+                <a:solidFill>
+                  <a:srgbClr val="000000"/>
+                </a:solidFill>
+                <a:miter lim="800000"/>
+                <a:headEnd/>
+                <a:tailEnd/>
+              </a14:hiddenLine>
+            </a:ext>
+            <a:ext uri="{FAA26D3D-D897-4be2-8F04-BA451C77F1D7}">
+              <ma14:placeholderFlag xmlns:ma14="http://schemas.microsoft.com/office/mac/drawingml/2011/main" xmlns="" val="1"/>
+            </a:ext>
+          </a:extLst>
+        </p:spPr>
+        <p:txBody>
+          <a:bodyPr/>
+          <a:lstStyle/>
+          <a:p>
+            <a:endParaRPr lang="en-US" altLang="en-US">
+              <a:latin typeface="Times New Roman" charset="0"/>
+            </a:endParaRPr>
+          </a:p>
+        </p:txBody>
+      </p:sp>
+    </p:spTree>
+    <p:extLst>
+      <p:ext uri="{BB962C8B-B14F-4D97-AF65-F5344CB8AC3E}">
+        <p14:creationId xmlns:p14="http://schemas.microsoft.com/office/powerpoint/2010/main" val="1424220061"/>
+      </p:ext>
+    </p:extLst>
+  </p:cSld>
+  <p:clrMapOvr>
+    <a:masterClrMapping/>
+  </p:clrMapOvr>
+</p:notes>
+</file>
+
 <file path=ppt/notesSlides/notesSlide21.xml><?xml version="1.0" encoding="utf-8"?>
 <p:notes xmlns:a="http://schemas.openxmlformats.org/drawingml/2006/main" xmlns:r="http://schemas.openxmlformats.org/officeDocument/2006/relationships" xmlns:p="http://schemas.openxmlformats.org/presentationml/2006/main">
   <p:cSld>
@@ -3134,6 +3226,95 @@
     <p:extLst>
       <p:ext uri="{BB962C8B-B14F-4D97-AF65-F5344CB8AC3E}">
         <p14:creationId xmlns:p14="http://schemas.microsoft.com/office/powerpoint/2010/main" val="152719972"/>
+      </p:ext>
+    </p:extLst>
+  </p:cSld>
+  <p:clrMapOvr>
+    <a:masterClrMapping/>
+  </p:clrMapOvr>
+</p:notes>
+</file>
+
+<file path=ppt/notesSlides/notesSlide37.xml><?xml version="1.0" encoding="utf-8"?>
+<p:notes xmlns:a="http://schemas.openxmlformats.org/drawingml/2006/main" xmlns:r="http://schemas.openxmlformats.org/officeDocument/2006/relationships" xmlns:p="http://schemas.openxmlformats.org/presentationml/2006/main">
+  <p:cSld>
+    <p:spTree>
+      <p:nvGrpSpPr>
+        <p:cNvPr id="1" name=""/>
+        <p:cNvGrpSpPr/>
+        <p:nvPr/>
+      </p:nvGrpSpPr>
+      <p:grpSpPr>
+        <a:xfrm>
+          <a:off x="0" y="0"/>
+          <a:ext cx="0" cy="0"/>
+          <a:chOff x="0" y="0"/>
+          <a:chExt cx="0" cy="0"/>
+        </a:xfrm>
+      </p:grpSpPr>
+      <p:sp>
+        <p:nvSpPr>
+          <p:cNvPr id="44034" name="Slide Image Placeholder 1"/>
+          <p:cNvSpPr>
+            <a:spLocks noGrp="1" noRot="1" noChangeAspect="1" noTextEdit="1"/>
+          </p:cNvSpPr>
+          <p:nvPr>
+            <p:ph type="sldImg"/>
+          </p:nvPr>
+        </p:nvSpPr>
+        <p:spPr>
+          <a:ln/>
+        </p:spPr>
+      </p:sp>
+      <p:sp>
+        <p:nvSpPr>
+          <p:cNvPr id="105474" name="Notes Placeholder 2"/>
+          <p:cNvSpPr>
+            <a:spLocks noGrp="1"/>
+          </p:cNvSpPr>
+          <p:nvPr>
+            <p:ph type="body" idx="1"/>
+          </p:nvPr>
+        </p:nvSpPr>
+        <p:spPr>
+          <a:noFill/>
+          <a:extLst>
+            <a:ext uri="{909E8E84-426E-40DD-AFC4-6F175D3DCCD1}">
+              <a14:hiddenFill xmlns:a14="http://schemas.microsoft.com/office/drawing/2010/main">
+                <a:solidFill>
+                  <a:srgbClr val="FFFFFF"/>
+                </a:solidFill>
+              </a14:hiddenFill>
+            </a:ext>
+            <a:ext uri="{91240B29-F687-4F45-9708-019B960494DF}">
+              <a14:hiddenLine xmlns:a14="http://schemas.microsoft.com/office/drawing/2010/main" w="9525">
+                <a:solidFill>
+                  <a:srgbClr val="000000"/>
+                </a:solidFill>
+                <a:miter lim="800000"/>
+                <a:headEnd/>
+                <a:tailEnd/>
+              </a14:hiddenLine>
+            </a:ext>
+            <a:ext uri="{FAA26D3D-D897-4be2-8F04-BA451C77F1D7}">
+              <ma14:placeholderFlag xmlns:ma14="http://schemas.microsoft.com/office/mac/drawingml/2011/main" xmlns="" val="1"/>
+            </a:ext>
+          </a:extLst>
+        </p:spPr>
+        <p:txBody>
+          <a:bodyPr/>
+          <a:lstStyle/>
+          <a:p>
+            <a:endParaRPr lang="en-US" altLang="en-US">
+              <a:latin typeface="Times New Roman" charset="0"/>
+            </a:endParaRPr>
+          </a:p>
+        </p:txBody>
+      </p:sp>
+    </p:spTree>
+    <p:extLst>
+      <p:ext uri="{BB962C8B-B14F-4D97-AF65-F5344CB8AC3E}">
+        <p14:creationId xmlns:p14="http://schemas.microsoft.com/office/powerpoint/2010/main" val="1491514610"/>
       </p:ext>
     </p:extLst>
   </p:cSld>
@@ -11813,7 +11994,53 @@
             <a:pPr lvl="1" eaLnBrk="1" hangingPunct="1">
               <a:defRPr/>
             </a:pPr>
+            <a:r>
+              <a:rPr lang="en-US" altLang="en-US" sz="2000" dirty="0"/>
+              <a:t>Modeling decision – do we care about estimate for each individual fish? Not at all. So let’s let intercept be random</a:t>
+            </a:r>
+          </a:p>
+          <a:p>
+            <a:pPr lvl="1" eaLnBrk="1" hangingPunct="1">
+              <a:defRPr/>
+            </a:pPr>
             <a:endParaRPr lang="en-US" altLang="en-US" sz="2000" dirty="0"/>
+          </a:p>
+          <a:p>
+            <a:pPr lvl="1" eaLnBrk="1" hangingPunct="1">
+              <a:defRPr/>
+            </a:pPr>
+            <a:r>
+              <a:rPr lang="en-US" altLang="en-US" sz="2000" dirty="0" err="1"/>
+              <a:t>lme</a:t>
+            </a:r>
+            <a:r>
+              <a:rPr lang="en-US" altLang="en-US" sz="2000" dirty="0"/>
+              <a:t>(</a:t>
+            </a:r>
+            <a:r>
+              <a:rPr lang="en-US" altLang="en-US" sz="2000" dirty="0" err="1"/>
+              <a:t>Weight~Length,data</a:t>
+            </a:r>
+            <a:r>
+              <a:rPr lang="en-US" altLang="en-US" sz="2000" dirty="0"/>
+              <a:t>=</a:t>
+            </a:r>
+            <a:r>
+              <a:rPr lang="en-US" altLang="en-US" sz="2000" dirty="0" err="1"/>
+              <a:t>LenW,random</a:t>
+            </a:r>
+            <a:r>
+              <a:rPr lang="en-US" altLang="en-US" sz="2000" dirty="0"/>
+              <a:t> = ~1 |</a:t>
+            </a:r>
+            <a:r>
+              <a:rPr lang="en-US" altLang="en-US" sz="2000" dirty="0" err="1"/>
+              <a:t>Subject,method</a:t>
+            </a:r>
+            <a:r>
+              <a:rPr lang="en-US" altLang="en-US" sz="2000" dirty="0"/>
+              <a:t>="REML") </a:t>
+            </a:r>
           </a:p>
           <a:p>
             <a:pPr lvl="2" eaLnBrk="1" hangingPunct="1">
@@ -12665,6 +12892,415 @@
 </p:sld>
 </file>
 
+<file path=ppt/slides/slide22.xml><?xml version="1.0" encoding="utf-8"?>
+<p:sld xmlns:a="http://schemas.openxmlformats.org/drawingml/2006/main" xmlns:r="http://schemas.openxmlformats.org/officeDocument/2006/relationships" xmlns:p="http://schemas.openxmlformats.org/presentationml/2006/main">
+  <p:cSld>
+    <p:spTree>
+      <p:nvGrpSpPr>
+        <p:cNvPr id="1" name=""/>
+        <p:cNvGrpSpPr/>
+        <p:nvPr/>
+      </p:nvGrpSpPr>
+      <p:grpSpPr>
+        <a:xfrm>
+          <a:off x="0" y="0"/>
+          <a:ext cx="0" cy="0"/>
+          <a:chOff x="0" y="0"/>
+          <a:chExt cx="0" cy="0"/>
+        </a:xfrm>
+      </p:grpSpPr>
+      <p:sp>
+        <p:nvSpPr>
+          <p:cNvPr id="57346" name="Rectangle 2"/>
+          <p:cNvSpPr>
+            <a:spLocks noGrp="1" noChangeArrowheads="1"/>
+          </p:cNvSpPr>
+          <p:nvPr>
+            <p:ph type="title"/>
+          </p:nvPr>
+        </p:nvSpPr>
+        <p:spPr>
+          <a:xfrm>
+            <a:off x="838200" y="-59421"/>
+            <a:ext cx="10515600" cy="1325563"/>
+          </a:xfrm>
+        </p:spPr>
+        <p:txBody>
+          <a:bodyPr/>
+          <a:lstStyle/>
+          <a:p>
+            <a:pPr algn="ctr" eaLnBrk="1" hangingPunct="1">
+              <a:defRPr/>
+            </a:pPr>
+            <a:r>
+              <a:rPr lang="en-US" altLang="en-US" sz="3600"/>
+              <a:t>Fixed and Random Effects Together</a:t>
+            </a:r>
+            <a:br>
+              <a:rPr lang="en-US" altLang="en-US" sz="3600"/>
+            </a:br>
+            <a:r>
+              <a:rPr lang="en-US" altLang="en-US" sz="3600"/>
+              <a:t>(Length-weight regressions)</a:t>
+            </a:r>
+          </a:p>
+        </p:txBody>
+      </p:sp>
+      <p:sp>
+        <p:nvSpPr>
+          <p:cNvPr id="57347" name="Rectangle 3"/>
+          <p:cNvSpPr>
+            <a:spLocks noGrp="1" noChangeArrowheads="1"/>
+          </p:cNvSpPr>
+          <p:nvPr>
+            <p:ph type="body" idx="1"/>
+          </p:nvPr>
+        </p:nvSpPr>
+        <p:spPr>
+          <a:xfrm>
+            <a:off x="838200" y="1401079"/>
+            <a:ext cx="10515600" cy="4351338"/>
+          </a:xfrm>
+        </p:spPr>
+        <p:txBody>
+          <a:bodyPr>
+            <a:noAutofit/>
+          </a:bodyPr>
+          <a:lstStyle/>
+          <a:p>
+            <a:pPr eaLnBrk="1" hangingPunct="1">
+              <a:lnSpc>
+                <a:spcPct val="80000"/>
+              </a:lnSpc>
+              <a:buFont typeface="Wingdings" charset="2"/>
+              <a:buNone/>
+              <a:defRPr/>
+            </a:pPr>
+            <a:r>
+              <a:rPr lang="en-US" altLang="en-US" sz="1100" dirty="0"/>
+              <a:t>Linear mixed-effects model fit by REML</a:t>
+            </a:r>
+          </a:p>
+          <a:p>
+            <a:pPr eaLnBrk="1" hangingPunct="1">
+              <a:lnSpc>
+                <a:spcPct val="80000"/>
+              </a:lnSpc>
+              <a:buFont typeface="Wingdings" charset="2"/>
+              <a:buNone/>
+              <a:defRPr/>
+            </a:pPr>
+            <a:r>
+              <a:rPr lang="en-US" altLang="en-US" sz="1100" dirty="0"/>
+              <a:t> Data: </a:t>
+            </a:r>
+            <a:r>
+              <a:rPr lang="en-US" altLang="en-US" sz="1100" dirty="0" err="1"/>
+              <a:t>LenW</a:t>
+            </a:r>
+            <a:r>
+              <a:rPr lang="en-US" altLang="en-US" sz="1100" dirty="0"/>
+              <a:t> </a:t>
+            </a:r>
+          </a:p>
+          <a:p>
+            <a:pPr eaLnBrk="1" hangingPunct="1">
+              <a:lnSpc>
+                <a:spcPct val="80000"/>
+              </a:lnSpc>
+              <a:buFont typeface="Wingdings" charset="2"/>
+              <a:buNone/>
+              <a:defRPr/>
+            </a:pPr>
+            <a:r>
+              <a:rPr lang="en-US" altLang="en-US" sz="1100" dirty="0"/>
+              <a:t>      AIC      BIC  </a:t>
+            </a:r>
+            <a:r>
+              <a:rPr lang="en-US" altLang="en-US" sz="1100" dirty="0" err="1"/>
+              <a:t>logLik</a:t>
+            </a:r>
+            <a:r>
+              <a:rPr lang="en-US" altLang="en-US" sz="1100" dirty="0"/>
+              <a:t> </a:t>
+            </a:r>
+          </a:p>
+          <a:p>
+            <a:pPr eaLnBrk="1" hangingPunct="1">
+              <a:lnSpc>
+                <a:spcPct val="80000"/>
+              </a:lnSpc>
+              <a:buFont typeface="Wingdings" charset="2"/>
+              <a:buNone/>
+              <a:defRPr/>
+            </a:pPr>
+            <a:r>
+              <a:rPr lang="en-US" altLang="en-US" sz="1100" dirty="0"/>
+              <a:t>  6.72662 17.06649 0.63669</a:t>
+            </a:r>
+          </a:p>
+          <a:p>
+            <a:pPr eaLnBrk="1" hangingPunct="1">
+              <a:lnSpc>
+                <a:spcPct val="80000"/>
+              </a:lnSpc>
+              <a:buFont typeface="Wingdings" charset="2"/>
+              <a:buNone/>
+              <a:defRPr/>
+            </a:pPr>
+            <a:endParaRPr lang="en-US" altLang="en-US" sz="1100" dirty="0"/>
+          </a:p>
+          <a:p>
+            <a:pPr eaLnBrk="1" hangingPunct="1">
+              <a:lnSpc>
+                <a:spcPct val="80000"/>
+              </a:lnSpc>
+              <a:buFont typeface="Wingdings" charset="2"/>
+              <a:buNone/>
+              <a:defRPr/>
+            </a:pPr>
+            <a:r>
+              <a:rPr lang="en-US" altLang="en-US" sz="1100" dirty="0"/>
+              <a:t>Random effects:</a:t>
+            </a:r>
+          </a:p>
+          <a:p>
+            <a:pPr eaLnBrk="1" hangingPunct="1">
+              <a:lnSpc>
+                <a:spcPct val="80000"/>
+              </a:lnSpc>
+              <a:buFont typeface="Wingdings" charset="2"/>
+              <a:buNone/>
+              <a:defRPr/>
+            </a:pPr>
+            <a:r>
+              <a:rPr lang="en-US" altLang="en-US" sz="1100" dirty="0"/>
+              <a:t> Formula:  ~ 1 | Subject</a:t>
+            </a:r>
+          </a:p>
+          <a:p>
+            <a:pPr eaLnBrk="1" hangingPunct="1">
+              <a:lnSpc>
+                <a:spcPct val="80000"/>
+              </a:lnSpc>
+              <a:buFont typeface="Wingdings" charset="2"/>
+              <a:buNone/>
+              <a:defRPr/>
+            </a:pPr>
+            <a:r>
+              <a:rPr lang="en-US" altLang="en-US" sz="1100" dirty="0"/>
+              <a:t>        (Intercept) Residual </a:t>
+            </a:r>
+          </a:p>
+          <a:p>
+            <a:pPr eaLnBrk="1" hangingPunct="1">
+              <a:lnSpc>
+                <a:spcPct val="80000"/>
+              </a:lnSpc>
+              <a:buFont typeface="Wingdings" charset="2"/>
+              <a:buNone/>
+              <a:defRPr/>
+            </a:pPr>
+            <a:r>
+              <a:rPr lang="en-US" altLang="en-US" sz="1100" dirty="0" err="1"/>
+              <a:t>StdDev</a:t>
+            </a:r>
+            <a:r>
+              <a:rPr lang="en-US" altLang="en-US" sz="1100" dirty="0"/>
+              <a:t>:   0.2113517 0.205754</a:t>
+            </a:r>
+          </a:p>
+          <a:p>
+            <a:pPr eaLnBrk="1" hangingPunct="1">
+              <a:lnSpc>
+                <a:spcPct val="80000"/>
+              </a:lnSpc>
+              <a:buFont typeface="Wingdings" charset="2"/>
+              <a:buNone/>
+              <a:defRPr/>
+            </a:pPr>
+            <a:endParaRPr lang="en-US" altLang="en-US" sz="1100" dirty="0"/>
+          </a:p>
+          <a:p>
+            <a:pPr eaLnBrk="1" hangingPunct="1">
+              <a:lnSpc>
+                <a:spcPct val="80000"/>
+              </a:lnSpc>
+              <a:buFont typeface="Wingdings" charset="2"/>
+              <a:buNone/>
+              <a:defRPr/>
+            </a:pPr>
+            <a:r>
+              <a:rPr lang="en-US" altLang="en-US" sz="1100" dirty="0"/>
+              <a:t>Fixed effects: Weight ~ Length </a:t>
+            </a:r>
+          </a:p>
+          <a:p>
+            <a:pPr eaLnBrk="1" hangingPunct="1">
+              <a:lnSpc>
+                <a:spcPct val="80000"/>
+              </a:lnSpc>
+              <a:buFont typeface="Wingdings" charset="2"/>
+              <a:buNone/>
+              <a:defRPr/>
+            </a:pPr>
+            <a:r>
+              <a:rPr lang="en-US" altLang="en-US" sz="1100" dirty="0"/>
+              <a:t>                Value  </a:t>
+            </a:r>
+            <a:r>
+              <a:rPr lang="en-US" altLang="en-US" sz="1100" dirty="0" err="1"/>
+              <a:t>Std.Error</a:t>
+            </a:r>
+            <a:r>
+              <a:rPr lang="en-US" altLang="en-US" sz="1100" dirty="0"/>
+              <a:t> DF   t-value p-value </a:t>
+            </a:r>
+          </a:p>
+          <a:p>
+            <a:pPr eaLnBrk="1" hangingPunct="1">
+              <a:lnSpc>
+                <a:spcPct val="80000"/>
+              </a:lnSpc>
+              <a:buFont typeface="Wingdings" charset="2"/>
+              <a:buNone/>
+              <a:defRPr/>
+            </a:pPr>
+            <a:r>
+              <a:rPr lang="en-US" altLang="en-US" sz="1100" dirty="0"/>
+              <a:t>(Intercept) -0.026674 0.09560888 89   -0.2790  0.7809</a:t>
+            </a:r>
+          </a:p>
+          <a:p>
+            <a:pPr eaLnBrk="1" hangingPunct="1">
+              <a:lnSpc>
+                <a:spcPct val="80000"/>
+              </a:lnSpc>
+              <a:buFont typeface="Wingdings" charset="2"/>
+              <a:buNone/>
+              <a:defRPr/>
+            </a:pPr>
+            <a:r>
+              <a:rPr lang="en-US" altLang="en-US" sz="1100" dirty="0"/>
+              <a:t>     Length  3.017151 0.02958709 89  101.9753  &lt;.0001</a:t>
+            </a:r>
+          </a:p>
+          <a:p>
+            <a:pPr eaLnBrk="1" hangingPunct="1">
+              <a:lnSpc>
+                <a:spcPct val="80000"/>
+              </a:lnSpc>
+              <a:buFont typeface="Wingdings" charset="2"/>
+              <a:buNone/>
+              <a:defRPr/>
+            </a:pPr>
+            <a:endParaRPr lang="en-US" altLang="en-US" sz="1100" dirty="0"/>
+          </a:p>
+          <a:p>
+            <a:pPr eaLnBrk="1" hangingPunct="1">
+              <a:lnSpc>
+                <a:spcPct val="80000"/>
+              </a:lnSpc>
+              <a:buFont typeface="Wingdings" charset="2"/>
+              <a:buNone/>
+              <a:defRPr/>
+            </a:pPr>
+            <a:r>
+              <a:rPr lang="en-US" altLang="en-US" sz="1100" dirty="0"/>
+              <a:t>Standardized Within-Group Residuals:</a:t>
+            </a:r>
+          </a:p>
+          <a:p>
+            <a:pPr eaLnBrk="1" hangingPunct="1">
+              <a:lnSpc>
+                <a:spcPct val="80000"/>
+              </a:lnSpc>
+              <a:buFont typeface="Wingdings" charset="2"/>
+              <a:buNone/>
+              <a:defRPr/>
+            </a:pPr>
+            <a:r>
+              <a:rPr lang="en-US" altLang="en-US" sz="1100" dirty="0"/>
+              <a:t>       Min         Q1         Med        Q3      Max </a:t>
+            </a:r>
+          </a:p>
+          <a:p>
+            <a:pPr eaLnBrk="1" hangingPunct="1">
+              <a:lnSpc>
+                <a:spcPct val="80000"/>
+              </a:lnSpc>
+              <a:buFont typeface="Wingdings" charset="2"/>
+              <a:buNone/>
+              <a:defRPr/>
+            </a:pPr>
+            <a:r>
+              <a:rPr lang="en-US" altLang="en-US" sz="1100" dirty="0"/>
+              <a:t> -2.419116 -0.5799786 -0.05204277 0.5719096 2.320844</a:t>
+            </a:r>
+          </a:p>
+          <a:p>
+            <a:pPr eaLnBrk="1" hangingPunct="1">
+              <a:lnSpc>
+                <a:spcPct val="80000"/>
+              </a:lnSpc>
+              <a:buFont typeface="Wingdings" charset="2"/>
+              <a:buNone/>
+              <a:defRPr/>
+            </a:pPr>
+            <a:endParaRPr lang="en-US" altLang="en-US" sz="1100" dirty="0"/>
+          </a:p>
+          <a:p>
+            <a:pPr eaLnBrk="1" hangingPunct="1">
+              <a:lnSpc>
+                <a:spcPct val="80000"/>
+              </a:lnSpc>
+              <a:buFont typeface="Wingdings" charset="2"/>
+              <a:buNone/>
+              <a:defRPr/>
+            </a:pPr>
+            <a:r>
+              <a:rPr lang="en-US" altLang="en-US" sz="1100" dirty="0"/>
+              <a:t>Number of Observations: 100</a:t>
+            </a:r>
+          </a:p>
+          <a:p>
+            <a:pPr eaLnBrk="1" hangingPunct="1">
+              <a:lnSpc>
+                <a:spcPct val="80000"/>
+              </a:lnSpc>
+              <a:buFont typeface="Wingdings" charset="2"/>
+              <a:buNone/>
+              <a:defRPr/>
+            </a:pPr>
+            <a:r>
+              <a:rPr lang="en-US" altLang="en-US" sz="1100" dirty="0"/>
+              <a:t>Number of Groups: 10 </a:t>
+            </a:r>
+          </a:p>
+          <a:p>
+            <a:pPr eaLnBrk="1" hangingPunct="1">
+              <a:lnSpc>
+                <a:spcPct val="80000"/>
+              </a:lnSpc>
+              <a:defRPr/>
+            </a:pPr>
+            <a:endParaRPr lang="en-US" altLang="en-US" sz="1100" dirty="0"/>
+          </a:p>
+        </p:txBody>
+      </p:sp>
+    </p:spTree>
+    <p:extLst>
+      <p:ext uri="{BB962C8B-B14F-4D97-AF65-F5344CB8AC3E}">
+        <p14:creationId xmlns:p14="http://schemas.microsoft.com/office/powerpoint/2010/main" val="1056641072"/>
+      </p:ext>
+    </p:extLst>
+  </p:cSld>
+  <p:clrMapOvr>
+    <a:masterClrMapping/>
+  </p:clrMapOvr>
+</p:sld>
+</file>
+
 <file path=ppt/slides/slide23.xml><?xml version="1.0" encoding="utf-8"?>
 <p:sld xmlns:a="http://schemas.openxmlformats.org/drawingml/2006/main" xmlns:r="http://schemas.openxmlformats.org/officeDocument/2006/relationships" xmlns:p="http://schemas.openxmlformats.org/presentationml/2006/main">
   <p:cSld>
@@ -16006,7 +16642,28 @@
               </a:defRPr>
             </a:lvl9pPr>
           </a:lstStyle>
-          <a:p/>
+          <a:p>
+            <a:r>
+              <a:rPr lang="en-US" altLang="en-US" sz="2000" dirty="0"/>
+              <a:t>Model 8 (</a:t>
+            </a:r>
+            <a:r>
+              <a:rPr lang="en-US" altLang="en-US" sz="2000" dirty="0" err="1"/>
+              <a:t>AICc</a:t>
+            </a:r>
+            <a:r>
+              <a:rPr lang="en-US" altLang="en-US" sz="2000" dirty="0"/>
+              <a:t>=36.3) and Model 2 (</a:t>
+            </a:r>
+            <a:r>
+              <a:rPr lang="en-US" altLang="en-US" sz="2000" dirty="0" err="1"/>
+              <a:t>AICc</a:t>
+            </a:r>
+            <a:r>
+              <a:rPr lang="en-US" altLang="en-US" sz="2000" dirty="0"/>
+              <a:t>=39.6) much lower than others </a:t>
+            </a:r>
+          </a:p>
         </p:txBody>
       </p:sp>
       <p:sp>
@@ -16779,6 +17436,17 @@
           <a:lstStyle/>
           <a:p>
             <a:pPr algn="ctr"/>
+            <a:r>
+              <a:rPr lang="en-US" sz="2800" b="1" dirty="0"/>
+              <a:t>SAME RESULTS</a:t>
+            </a:r>
+          </a:p>
+          <a:p>
+            <a:pPr algn="ctr"/>
+            <a:r>
+              <a:rPr lang="en-US" sz="2800" b="1" dirty="0"/>
+              <a:t>Both nested due to labelling</a:t>
+            </a:r>
           </a:p>
         </p:txBody>
       </p:sp>
@@ -21426,6 +22094,388 @@
 </p:sld>
 </file>
 
+<file path=ppt/slides/slide47.xml><?xml version="1.0" encoding="utf-8"?>
+<p:sld xmlns:a="http://schemas.openxmlformats.org/drawingml/2006/main" xmlns:r="http://schemas.openxmlformats.org/officeDocument/2006/relationships" xmlns:p="http://schemas.openxmlformats.org/presentationml/2006/main">
+  <p:cSld>
+    <p:spTree>
+      <p:nvGrpSpPr>
+        <p:cNvPr id="1" name=""/>
+        <p:cNvGrpSpPr/>
+        <p:nvPr/>
+      </p:nvGrpSpPr>
+      <p:grpSpPr>
+        <a:xfrm>
+          <a:off x="0" y="0"/>
+          <a:ext cx="0" cy="0"/>
+          <a:chOff x="0" y="0"/>
+          <a:chExt cx="0" cy="0"/>
+        </a:xfrm>
+      </p:grpSpPr>
+      <p:sp>
+        <p:nvSpPr>
+          <p:cNvPr id="900" name="HeaderBar"/>
+          <p:cNvSpPr/>
+          <p:nvPr/>
+        </p:nvSpPr>
+        <p:spPr>
+          <a:xfrm>
+            <a:off x="0" y="0"/>
+            <a:ext cx="12192000" cy="787400"/>
+          </a:xfrm>
+          <a:prstGeom prst="rect">
+            <a:avLst/>
+          </a:prstGeom>
+          <a:solidFill>
+            <a:srgbClr val="23373B"/>
+          </a:solidFill>
+          <a:ln>
+            <a:noFill/>
+          </a:ln>
+        </p:spPr>
+        <p:txBody>
+          <a:bodyPr/>
+          <a:lstStyle/>
+          <a:p>
+            <a:endParaRPr/>
+          </a:p>
+        </p:txBody>
+      </p:sp>
+      <p:sp>
+        <p:nvSpPr>
+          <p:cNvPr id="903" name="TitleTxt"/>
+          <p:cNvSpPr/>
+          <p:nvPr/>
+        </p:nvSpPr>
+        <p:spPr>
+          <a:xfrm>
+            <a:off x="381000" y="0"/>
+            <a:ext cx="11557000" cy="787400"/>
+          </a:xfrm>
+          <a:prstGeom prst="rect">
+            <a:avLst/>
+          </a:prstGeom>
+          <a:noFill/>
+        </p:spPr>
+        <p:txBody>
+          <a:bodyPr wrap="square" lIns="0" tIns="0" rIns="0" bIns="0" anchor="ctr"/>
+          <a:lstStyle/>
+          <a:p>
+            <a:pPr algn="l"/>
+            <a:r>
+              <a:rPr lang="en-US" sz="2000" b="1" dirty="0">
+                <a:solidFill>
+                  <a:srgbClr val="FFFFFF"/>
+                </a:solidFill>
+              </a:rPr>
+              <a:t>GLMM on proportions with year as a random effect in R</a:t>
+            </a:r>
+          </a:p>
+        </p:txBody>
+      </p:sp>
+      <p:sp>
+        <p:nvSpPr>
+          <p:cNvPr id="902" name="CodeTxt"/>
+          <p:cNvSpPr/>
+          <p:nvPr/>
+        </p:nvSpPr>
+        <p:spPr>
+          <a:xfrm>
+            <a:off x="736600" y="1168400"/>
+            <a:ext cx="11176000" cy="4953000"/>
+          </a:xfrm>
+          <a:prstGeom prst="rect">
+            <a:avLst/>
+          </a:prstGeom>
+          <a:noFill/>
+        </p:spPr>
+        <p:txBody>
+          <a:bodyPr wrap="none" lIns="0" tIns="0" rIns="0" bIns="0" anchor="t"/>
+          <a:lstStyle/>
+          <a:p>
+            <a:pPr algn="l">
+              <a:lnSpc>
+                <a:spcPts val="2000"/>
+              </a:lnSpc>
+            </a:pPr>
+            <a:r>
+              <a:rPr lang="en-US" sz="1600" dirty="0">
+                <a:solidFill>
+                  <a:srgbClr val="333333"/>
+                </a:solidFill>
+                <a:latin typeface="Consolas"/>
+                <a:cs typeface="Consolas"/>
+              </a:rPr>
+              <a:t>#&gt; Generalized linear mixed model fit by maximum likelihood (Laplace</a:t>
+            </a:r>
+          </a:p>
+          <a:p>
+            <a:pPr algn="l">
+              <a:lnSpc>
+                <a:spcPts val="2000"/>
+              </a:lnSpc>
+            </a:pPr>
+            <a:r>
+              <a:rPr lang="en-US" sz="1600" dirty="0">
+                <a:solidFill>
+                  <a:srgbClr val="333333"/>
+                </a:solidFill>
+                <a:latin typeface="Consolas"/>
+                <a:cs typeface="Consolas"/>
+              </a:rPr>
+              <a:t>#&gt;   Approximation) [glmerMod]</a:t>
+            </a:r>
+          </a:p>
+          <a:p>
+            <a:pPr algn="l">
+              <a:lnSpc>
+                <a:spcPts val="2000"/>
+              </a:lnSpc>
+            </a:pPr>
+            <a:r>
+              <a:rPr lang="en-US" sz="1600" dirty="0">
+                <a:solidFill>
+                  <a:srgbClr val="333333"/>
+                </a:solidFill>
+                <a:latin typeface="Consolas"/>
+                <a:cs typeface="Consolas"/>
+              </a:rPr>
+              <a:t>#&gt;  Family: binomial  ( logit )</a:t>
+            </a:r>
+          </a:p>
+          <a:p>
+            <a:pPr algn="l">
+              <a:lnSpc>
+                <a:spcPts val="2000"/>
+              </a:lnSpc>
+            </a:pPr>
+            <a:r>
+              <a:rPr lang="en-US" sz="1600" dirty="0">
+                <a:solidFill>
+                  <a:srgbClr val="333333"/>
+                </a:solidFill>
+                <a:latin typeface="Consolas"/>
+                <a:cs typeface="Consolas"/>
+              </a:rPr>
+              <a:t>#&gt; Formula: cbind(nbchicks, nbpairs - nbchicks) ~ temp + rainfall + (1 |</a:t>
+            </a:r>
+          </a:p>
+          <a:p>
+            <a:pPr algn="l">
+              <a:lnSpc>
+                <a:spcPts val="2000"/>
+              </a:lnSpc>
+            </a:pPr>
+            <a:r>
+              <a:rPr lang="en-US" sz="1600" dirty="0">
+                <a:solidFill>
+                  <a:srgbClr val="333333"/>
+                </a:solidFill>
+                <a:latin typeface="Consolas"/>
+                <a:cs typeface="Consolas"/>
+              </a:rPr>
+              <a:t>#&gt;     year)</a:t>
+            </a:r>
+          </a:p>
+          <a:p>
+            <a:pPr algn="l">
+              <a:lnSpc>
+                <a:spcPts val="2000"/>
+              </a:lnSpc>
+            </a:pPr>
+            <a:r>
+              <a:rPr lang="en-US" sz="1600" dirty="0">
+                <a:solidFill>
+                  <a:srgbClr val="333333"/>
+                </a:solidFill>
+                <a:latin typeface="Consolas"/>
+                <a:cs typeface="Consolas"/>
+              </a:rPr>
+              <a:t>#&gt;      AIC      BIC   logLik deviance df.resid</a:t>
+            </a:r>
+          </a:p>
+          <a:p>
+            <a:pPr algn="l">
+              <a:lnSpc>
+                <a:spcPts val="2000"/>
+              </a:lnSpc>
+            </a:pPr>
+            <a:r>
+              <a:rPr lang="en-US" sz="1600" dirty="0">
+                <a:solidFill>
+                  <a:srgbClr val="333333"/>
+                </a:solidFill>
+                <a:latin typeface="Consolas"/>
+                <a:cs typeface="Consolas"/>
+              </a:rPr>
+              <a:t>#&gt; 159.7418 164.2838 -75.8709 151.7418       19</a:t>
+            </a:r>
+          </a:p>
+          <a:p>
+            <a:pPr algn="l">
+              <a:lnSpc>
+                <a:spcPts val="2000"/>
+              </a:lnSpc>
+            </a:pPr>
+            <a:r>
+              <a:rPr lang="en-US" sz="1600" dirty="0">
+                <a:solidFill>
+                  <a:srgbClr val="333333"/>
+                </a:solidFill>
+                <a:latin typeface="Consolas"/>
+                <a:cs typeface="Consolas"/>
+              </a:rPr>
+              <a:t>#&gt; Random effects:</a:t>
+            </a:r>
+          </a:p>
+          <a:p>
+            <a:pPr algn="l">
+              <a:lnSpc>
+                <a:spcPts val="2000"/>
+              </a:lnSpc>
+            </a:pPr>
+            <a:r>
+              <a:rPr lang="en-US" sz="1600" dirty="0">
+                <a:solidFill>
+                  <a:srgbClr val="333333"/>
+                </a:solidFill>
+                <a:latin typeface="Consolas"/>
+                <a:cs typeface="Consolas"/>
+              </a:rPr>
+              <a:t>#&gt;  Groups Name        Std.Dev.</a:t>
+            </a:r>
+          </a:p>
+          <a:p>
+            <a:pPr algn="l">
+              <a:lnSpc>
+                <a:spcPts val="2000"/>
+              </a:lnSpc>
+            </a:pPr>
+            <a:r>
+              <a:rPr lang="en-US" sz="1600" dirty="0">
+                <a:solidFill>
+                  <a:srgbClr val="333333"/>
+                </a:solidFill>
+                <a:latin typeface="Consolas"/>
+                <a:cs typeface="Consolas"/>
+              </a:rPr>
+              <a:t>#&gt;  year   (Intercept) 0.478</a:t>
+            </a:r>
+          </a:p>
+          <a:p>
+            <a:pPr algn="l">
+              <a:lnSpc>
+                <a:spcPts val="2000"/>
+              </a:lnSpc>
+            </a:pPr>
+            <a:r>
+              <a:rPr lang="en-US" sz="1600" dirty="0">
+                <a:solidFill>
+                  <a:srgbClr val="333333"/>
+                </a:solidFill>
+                <a:latin typeface="Consolas"/>
+                <a:cs typeface="Consolas"/>
+              </a:rPr>
+              <a:t>#&gt; Number of obs: 23, groups:  year, 23</a:t>
+            </a:r>
+          </a:p>
+          <a:p>
+            <a:pPr algn="l">
+              <a:lnSpc>
+                <a:spcPts val="2000"/>
+              </a:lnSpc>
+            </a:pPr>
+            <a:r>
+              <a:rPr lang="en-US" sz="1600" dirty="0">
+                <a:solidFill>
+                  <a:srgbClr val="333333"/>
+                </a:solidFill>
+                <a:latin typeface="Consolas"/>
+                <a:cs typeface="Consolas"/>
+              </a:rPr>
+              <a:t>#&gt; Fixed Effects:</a:t>
+            </a:r>
+          </a:p>
+          <a:p>
+            <a:pPr algn="l">
+              <a:lnSpc>
+                <a:spcPts val="2000"/>
+              </a:lnSpc>
+            </a:pPr>
+            <a:r>
+              <a:rPr lang="en-US" sz="1600" dirty="0">
+                <a:solidFill>
+                  <a:srgbClr val="333333"/>
+                </a:solidFill>
+                <a:latin typeface="Consolas"/>
+                <a:cs typeface="Consolas"/>
+              </a:rPr>
+              <a:t>#&gt; (Intercept)         temp     rainfall</a:t>
+            </a:r>
+          </a:p>
+          <a:p>
+            <a:pPr algn="l">
+              <a:lnSpc>
+                <a:spcPts val="2000"/>
+              </a:lnSpc>
+            </a:pPr>
+            <a:r>
+              <a:rPr lang="en-US" sz="1600" dirty="0">
+                <a:solidFill>
+                  <a:srgbClr val="333333"/>
+                </a:solidFill>
+                <a:latin typeface="Consolas"/>
+                <a:cs typeface="Consolas"/>
+              </a:rPr>
+              <a:t>#&gt;    2.478277    -0.026616    -0.008226</a:t>
+            </a:r>
+          </a:p>
+        </p:txBody>
+      </p:sp>
+      <p:sp>
+        <p:nvSpPr>
+          <p:cNvPr id="904" name="PageNum"/>
+          <p:cNvSpPr/>
+          <p:nvPr/>
+        </p:nvSpPr>
+        <p:spPr>
+          <a:xfrm>
+            <a:off x="10604500" y="6324600"/>
+            <a:ext cx="1206500" cy="304800"/>
+          </a:xfrm>
+          <a:prstGeom prst="rect">
+            <a:avLst/>
+          </a:prstGeom>
+          <a:noFill/>
+        </p:spPr>
+        <p:txBody>
+          <a:bodyPr wrap="none" lIns="0" tIns="0" rIns="0" bIns="0" anchor="ctr"/>
+          <a:lstStyle/>
+          <a:p>
+            <a:pPr algn="r"/>
+            <a:r>
+              <a:rPr lang="en-US" sz="1400" dirty="0">
+                <a:solidFill>
+                  <a:srgbClr val="808080"/>
+                </a:solidFill>
+              </a:rPr>
+              <a:t>291</a:t>
+            </a:r>
+          </a:p>
+        </p:txBody>
+      </p:sp>
+    </p:spTree>
+    <p:extLst>
+      <p:ext uri="{BB962C8B-B14F-4D97-AF65-F5344CB8AC3E}">
+        <p14:creationId xmlns:p14="http://schemas.microsoft.com/office/powerpoint/2010/main" val="735819776"/>
+      </p:ext>
+    </p:extLst>
+  </p:cSld>
+  <p:clrMapOvr>
+    <a:masterClrMapping/>
+  </p:clrMapOvr>
+</p:sld>
+</file>
+
 <file path=ppt/slides/slide48.xml><?xml version="1.0" encoding="utf-8"?>
 <p:sld xmlns:a="http://schemas.openxmlformats.org/drawingml/2006/main" xmlns:r="http://schemas.openxmlformats.org/officeDocument/2006/relationships" xmlns:p="http://schemas.openxmlformats.org/presentationml/2006/main">
   <p:cSld>
@@ -28401,6 +29451,587 @@
     <p:extLst>
       <p:ext uri="{BB962C8B-B14F-4D97-AF65-F5344CB8AC3E}">
         <p14:creationId xmlns:p14="http://schemas.microsoft.com/office/powerpoint/2010/main" val="691397533"/>
+      </p:ext>
+    </p:extLst>
+  </p:cSld>
+  <p:clrMapOvr>
+    <a:masterClrMapping/>
+  </p:clrMapOvr>
+</p:sld>
+</file>
+
+<file path=ppt/slides/slide60.xml><?xml version="1.0" encoding="utf-8"?>
+<p:sld xmlns:a="http://schemas.openxmlformats.org/drawingml/2006/main" xmlns:r="http://schemas.openxmlformats.org/officeDocument/2006/relationships" xmlns:p="http://schemas.openxmlformats.org/presentationml/2006/main">
+  <p:cSld>
+    <p:spTree>
+      <p:nvGrpSpPr>
+        <p:cNvPr id="1" name=""/>
+        <p:cNvGrpSpPr/>
+        <p:nvPr/>
+      </p:nvGrpSpPr>
+      <p:grpSpPr>
+        <a:xfrm>
+          <a:off x="0" y="0"/>
+          <a:ext cx="0" cy="0"/>
+          <a:chOff x="0" y="0"/>
+          <a:chExt cx="0" cy="0"/>
+        </a:xfrm>
+      </p:grpSpPr>
+      <p:sp>
+        <p:nvSpPr>
+          <p:cNvPr id="43010" name="Rectangle 2"/>
+          <p:cNvSpPr>
+            <a:spLocks noGrp="1" noChangeArrowheads="1"/>
+          </p:cNvSpPr>
+          <p:nvPr>
+            <p:ph type="title"/>
+          </p:nvPr>
+        </p:nvSpPr>
+        <p:spPr/>
+        <p:txBody>
+          <a:bodyPr/>
+          <a:lstStyle/>
+          <a:p>
+            <a:pPr algn="ctr" eaLnBrk="1" hangingPunct="1">
+              <a:defRPr/>
+            </a:pPr>
+            <a:r>
+              <a:rPr lang="en-US" altLang="en-US" sz="4000"/>
+              <a:t>Fitting Length and Age Data</a:t>
+            </a:r>
+            <a:br>
+              <a:rPr lang="en-US" altLang="en-US" sz="4000"/>
+            </a:br>
+            <a:r>
+              <a:rPr lang="en-US" altLang="en-US" sz="4000"/>
+              <a:t>(Non-linear mixed model-III)</a:t>
+            </a:r>
+          </a:p>
+        </p:txBody>
+      </p:sp>
+      <p:sp>
+        <p:nvSpPr>
+          <p:cNvPr id="104450" name="Rectangle 5"/>
+          <p:cNvSpPr>
+            <a:spLocks noChangeArrowheads="1"/>
+          </p:cNvSpPr>
+          <p:nvPr/>
+        </p:nvSpPr>
+        <p:spPr bwMode="auto">
+          <a:xfrm>
+            <a:off x="1828800" y="2070100"/>
+            <a:ext cx="8610600" cy="4616648"/>
+          </a:xfrm>
+          <a:prstGeom prst="rect">
+            <a:avLst/>
+          </a:prstGeom>
+          <a:noFill/>
+          <a:ln>
+            <a:noFill/>
+          </a:ln>
+          <a:extLst>
+            <a:ext uri="{909E8E84-426E-40DD-AFC4-6F175D3DCCD1}">
+              <a14:hiddenFill xmlns:a14="http://schemas.microsoft.com/office/drawing/2010/main">
+                <a:solidFill>
+                  <a:srgbClr val="FFFFFF"/>
+                </a:solidFill>
+              </a14:hiddenFill>
+            </a:ext>
+            <a:ext uri="{91240B29-F687-4F45-9708-019B960494DF}">
+              <a14:hiddenLine xmlns:a14="http://schemas.microsoft.com/office/drawing/2010/main" w="9525">
+                <a:solidFill>
+                  <a:srgbClr val="000000"/>
+                </a:solidFill>
+                <a:miter lim="800000"/>
+                <a:headEnd/>
+                <a:tailEnd/>
+              </a14:hiddenLine>
+            </a:ext>
+          </a:extLst>
+        </p:spPr>
+        <p:txBody>
+          <a:bodyPr>
+            <a:spAutoFit/>
+          </a:bodyPr>
+          <a:lstStyle>
+            <a:lvl1pPr>
+              <a:spcBef>
+                <a:spcPct val="20000"/>
+              </a:spcBef>
+              <a:buClr>
+                <a:schemeClr val="folHlink"/>
+              </a:buClr>
+              <a:buSzPct val="60000"/>
+              <a:buFont typeface="Wingdings" charset="2"/>
+              <a:buChar char="n"/>
+              <a:defRPr sz="3200">
+                <a:solidFill>
+                  <a:schemeClr val="tx1"/>
+                </a:solidFill>
+                <a:latin typeface="Tahoma" charset="0"/>
+              </a:defRPr>
+            </a:lvl1pPr>
+            <a:lvl2pPr marL="742950" indent="-285750">
+              <a:spcBef>
+                <a:spcPct val="20000"/>
+              </a:spcBef>
+              <a:buClr>
+                <a:schemeClr val="hlink"/>
+              </a:buClr>
+              <a:buSzPct val="55000"/>
+              <a:buFont typeface="Wingdings" charset="2"/>
+              <a:buChar char="n"/>
+              <a:defRPr sz="2800">
+                <a:solidFill>
+                  <a:schemeClr val="tx1"/>
+                </a:solidFill>
+                <a:latin typeface="Tahoma" charset="0"/>
+              </a:defRPr>
+            </a:lvl2pPr>
+            <a:lvl3pPr marL="1143000" indent="-228600">
+              <a:spcBef>
+                <a:spcPct val="20000"/>
+              </a:spcBef>
+              <a:buClr>
+                <a:schemeClr val="folHlink"/>
+              </a:buClr>
+              <a:buSzPct val="50000"/>
+              <a:buFont typeface="Wingdings" charset="2"/>
+              <a:buChar char="n"/>
+              <a:defRPr sz="2400">
+                <a:solidFill>
+                  <a:schemeClr val="tx1"/>
+                </a:solidFill>
+                <a:latin typeface="Tahoma" charset="0"/>
+              </a:defRPr>
+            </a:lvl3pPr>
+            <a:lvl4pPr marL="1600200" indent="-228600">
+              <a:spcBef>
+                <a:spcPct val="20000"/>
+              </a:spcBef>
+              <a:buClr>
+                <a:schemeClr val="accent2"/>
+              </a:buClr>
+              <a:buSzPct val="55000"/>
+              <a:buFont typeface="Wingdings" charset="2"/>
+              <a:buChar char="n"/>
+              <a:defRPr sz="2000">
+                <a:solidFill>
+                  <a:schemeClr val="tx1"/>
+                </a:solidFill>
+                <a:latin typeface="Tahoma" charset="0"/>
+              </a:defRPr>
+            </a:lvl4pPr>
+            <a:lvl5pPr marL="2057400" indent="-228600">
+              <a:spcBef>
+                <a:spcPct val="20000"/>
+              </a:spcBef>
+              <a:buClr>
+                <a:schemeClr val="accent1"/>
+              </a:buClr>
+              <a:buSzPct val="50000"/>
+              <a:buFont typeface="Wingdings" charset="2"/>
+              <a:buChar char="n"/>
+              <a:defRPr sz="2000">
+                <a:solidFill>
+                  <a:schemeClr val="tx1"/>
+                </a:solidFill>
+                <a:latin typeface="Tahoma" charset="0"/>
+              </a:defRPr>
+            </a:lvl5pPr>
+            <a:lvl6pPr marL="2514600" indent="-228600" eaLnBrk="0" fontAlgn="base" hangingPunct="0">
+              <a:spcBef>
+                <a:spcPct val="20000"/>
+              </a:spcBef>
+              <a:spcAft>
+                <a:spcPct val="0"/>
+              </a:spcAft>
+              <a:buClr>
+                <a:schemeClr val="accent1"/>
+              </a:buClr>
+              <a:buSzPct val="50000"/>
+              <a:buFont typeface="Wingdings" charset="2"/>
+              <a:buChar char="n"/>
+              <a:defRPr sz="2000">
+                <a:solidFill>
+                  <a:schemeClr val="tx1"/>
+                </a:solidFill>
+                <a:latin typeface="Tahoma" charset="0"/>
+              </a:defRPr>
+            </a:lvl6pPr>
+            <a:lvl7pPr marL="2971800" indent="-228600" eaLnBrk="0" fontAlgn="base" hangingPunct="0">
+              <a:spcBef>
+                <a:spcPct val="20000"/>
+              </a:spcBef>
+              <a:spcAft>
+                <a:spcPct val="0"/>
+              </a:spcAft>
+              <a:buClr>
+                <a:schemeClr val="accent1"/>
+              </a:buClr>
+              <a:buSzPct val="50000"/>
+              <a:buFont typeface="Wingdings" charset="2"/>
+              <a:buChar char="n"/>
+              <a:defRPr sz="2000">
+                <a:solidFill>
+                  <a:schemeClr val="tx1"/>
+                </a:solidFill>
+                <a:latin typeface="Tahoma" charset="0"/>
+              </a:defRPr>
+            </a:lvl7pPr>
+            <a:lvl8pPr marL="3429000" indent="-228600" eaLnBrk="0" fontAlgn="base" hangingPunct="0">
+              <a:spcBef>
+                <a:spcPct val="20000"/>
+              </a:spcBef>
+              <a:spcAft>
+                <a:spcPct val="0"/>
+              </a:spcAft>
+              <a:buClr>
+                <a:schemeClr val="accent1"/>
+              </a:buClr>
+              <a:buSzPct val="50000"/>
+              <a:buFont typeface="Wingdings" charset="2"/>
+              <a:buChar char="n"/>
+              <a:defRPr sz="2000">
+                <a:solidFill>
+                  <a:schemeClr val="tx1"/>
+                </a:solidFill>
+                <a:latin typeface="Tahoma" charset="0"/>
+              </a:defRPr>
+            </a:lvl8pPr>
+            <a:lvl9pPr marL="3886200" indent="-228600" eaLnBrk="0" fontAlgn="base" hangingPunct="0">
+              <a:spcBef>
+                <a:spcPct val="20000"/>
+              </a:spcBef>
+              <a:spcAft>
+                <a:spcPct val="0"/>
+              </a:spcAft>
+              <a:buClr>
+                <a:schemeClr val="accent1"/>
+              </a:buClr>
+              <a:buSzPct val="50000"/>
+              <a:buFont typeface="Wingdings" charset="2"/>
+              <a:buChar char="n"/>
+              <a:defRPr sz="2000">
+                <a:solidFill>
+                  <a:schemeClr val="tx1"/>
+                </a:solidFill>
+                <a:latin typeface="Tahoma" charset="0"/>
+              </a:defRPr>
+            </a:lvl9pPr>
+          </a:lstStyle>
+          <a:p>
+            <a:pPr eaLnBrk="1" hangingPunct="1">
+              <a:spcBef>
+                <a:spcPct val="0"/>
+              </a:spcBef>
+              <a:buClrTx/>
+              <a:buSzTx/>
+              <a:buFontTx/>
+              <a:buNone/>
+            </a:pPr>
+            <a:r>
+              <a:rPr lang="en-AU" altLang="en-US" sz="1400"/>
+              <a:t>Nonlinear mixed-effects model fit by maximum likelihood</a:t>
+            </a:r>
+          </a:p>
+          <a:p>
+            <a:pPr eaLnBrk="1" hangingPunct="1">
+              <a:spcBef>
+                <a:spcPct val="0"/>
+              </a:spcBef>
+              <a:buClrTx/>
+              <a:buSzTx/>
+              <a:buFontTx/>
+              <a:buNone/>
+            </a:pPr>
+            <a:r>
+              <a:rPr lang="en-AU" altLang="en-US" sz="1400"/>
+              <a:t>  Model: Length ~ Linf * (1 - exp(-1 * Kappa * (Age - Tzero))) </a:t>
+            </a:r>
+          </a:p>
+          <a:p>
+            <a:pPr eaLnBrk="1" hangingPunct="1">
+              <a:spcBef>
+                <a:spcPct val="0"/>
+              </a:spcBef>
+              <a:buClrTx/>
+              <a:buSzTx/>
+              <a:buFontTx/>
+              <a:buNone/>
+            </a:pPr>
+            <a:r>
+              <a:rPr lang="en-AU" altLang="en-US" sz="1400"/>
+              <a:t> Data: AgeLen </a:t>
+            </a:r>
+          </a:p>
+          <a:p>
+            <a:pPr eaLnBrk="1" hangingPunct="1">
+              <a:spcBef>
+                <a:spcPct val="0"/>
+              </a:spcBef>
+              <a:buClrTx/>
+              <a:buSzTx/>
+              <a:buFontTx/>
+              <a:buNone/>
+            </a:pPr>
+            <a:r>
+              <a:rPr lang="en-AU" altLang="en-US" sz="1400"/>
+              <a:t>        AIC       BIC   logLik</a:t>
+            </a:r>
+          </a:p>
+          <a:p>
+            <a:pPr eaLnBrk="1" hangingPunct="1">
+              <a:spcBef>
+                <a:spcPct val="0"/>
+              </a:spcBef>
+              <a:buClrTx/>
+              <a:buSzTx/>
+              <a:buFontTx/>
+              <a:buNone/>
+            </a:pPr>
+            <a:r>
+              <a:rPr lang="en-AU" altLang="en-US" sz="1400"/>
+              <a:t>  -53.64647 -40.62062 31.82323</a:t>
+            </a:r>
+          </a:p>
+          <a:p>
+            <a:pPr eaLnBrk="1" hangingPunct="1">
+              <a:spcBef>
+                <a:spcPct val="0"/>
+              </a:spcBef>
+              <a:buClrTx/>
+              <a:buSzTx/>
+              <a:buFontTx/>
+              <a:buNone/>
+            </a:pPr>
+            <a:endParaRPr lang="en-AU" altLang="en-US" sz="1400"/>
+          </a:p>
+          <a:p>
+            <a:pPr eaLnBrk="1" hangingPunct="1">
+              <a:spcBef>
+                <a:spcPct val="0"/>
+              </a:spcBef>
+              <a:buClrTx/>
+              <a:buSzTx/>
+              <a:buFontTx/>
+              <a:buNone/>
+            </a:pPr>
+            <a:r>
+              <a:rPr lang="en-AU" altLang="en-US" sz="1400"/>
+              <a:t>Random effects:</a:t>
+            </a:r>
+          </a:p>
+          <a:p>
+            <a:pPr eaLnBrk="1" hangingPunct="1">
+              <a:spcBef>
+                <a:spcPct val="0"/>
+              </a:spcBef>
+              <a:buClrTx/>
+              <a:buSzTx/>
+              <a:buFontTx/>
+              <a:buNone/>
+            </a:pPr>
+            <a:r>
+              <a:rPr lang="en-AU" altLang="en-US" sz="1400"/>
+              <a:t> Formula: Linf ~ 1 | Subject</a:t>
+            </a:r>
+          </a:p>
+          <a:p>
+            <a:pPr eaLnBrk="1" hangingPunct="1">
+              <a:spcBef>
+                <a:spcPct val="0"/>
+              </a:spcBef>
+              <a:buClrTx/>
+              <a:buSzTx/>
+              <a:buFontTx/>
+              <a:buNone/>
+            </a:pPr>
+            <a:r>
+              <a:rPr lang="en-AU" altLang="en-US" sz="1400"/>
+              <a:t>           Linf  Residual</a:t>
+            </a:r>
+          </a:p>
+          <a:p>
+            <a:pPr eaLnBrk="1" hangingPunct="1">
+              <a:spcBef>
+                <a:spcPct val="0"/>
+              </a:spcBef>
+              <a:buClrTx/>
+              <a:buSzTx/>
+              <a:buFontTx/>
+              <a:buNone/>
+            </a:pPr>
+            <a:r>
+              <a:rPr lang="en-AU" altLang="en-US" sz="1400"/>
+              <a:t>StdDev: 8.28837 0.1060163</a:t>
+            </a:r>
+          </a:p>
+          <a:p>
+            <a:pPr eaLnBrk="1" hangingPunct="1">
+              <a:spcBef>
+                <a:spcPct val="0"/>
+              </a:spcBef>
+              <a:buClrTx/>
+              <a:buSzTx/>
+              <a:buFontTx/>
+              <a:buNone/>
+            </a:pPr>
+            <a:endParaRPr lang="en-AU" altLang="en-US" sz="1400"/>
+          </a:p>
+          <a:p>
+            <a:pPr eaLnBrk="1" hangingPunct="1">
+              <a:spcBef>
+                <a:spcPct val="0"/>
+              </a:spcBef>
+              <a:buClrTx/>
+              <a:buSzTx/>
+              <a:buFontTx/>
+              <a:buNone/>
+            </a:pPr>
+            <a:r>
+              <a:rPr lang="en-AU" altLang="en-US" sz="1400"/>
+              <a:t>Fixed effects: Linf + Kappa + Tzero ~ 1 </a:t>
+            </a:r>
+          </a:p>
+          <a:p>
+            <a:pPr eaLnBrk="1" hangingPunct="1">
+              <a:spcBef>
+                <a:spcPct val="0"/>
+              </a:spcBef>
+              <a:buClrTx/>
+              <a:buSzTx/>
+              <a:buFontTx/>
+              <a:buNone/>
+            </a:pPr>
+            <a:r>
+              <a:rPr lang="en-AU" altLang="en-US" sz="1400"/>
+              <a:t>         Value Std.Error DF  t-value p-value</a:t>
+            </a:r>
+          </a:p>
+          <a:p>
+            <a:pPr eaLnBrk="1" hangingPunct="1">
+              <a:spcBef>
+                <a:spcPct val="0"/>
+              </a:spcBef>
+              <a:buClrTx/>
+              <a:buSzTx/>
+              <a:buFontTx/>
+              <a:buNone/>
+            </a:pPr>
+            <a:r>
+              <a:rPr lang="en-AU" altLang="en-US" sz="1400"/>
+              <a:t>Linf  97.02240 2.6629267 88  36.4345  0.0000</a:t>
+            </a:r>
+          </a:p>
+          <a:p>
+            <a:pPr eaLnBrk="1" hangingPunct="1">
+              <a:spcBef>
+                <a:spcPct val="0"/>
+              </a:spcBef>
+              <a:buClrTx/>
+              <a:buSzTx/>
+              <a:buFontTx/>
+              <a:buNone/>
+            </a:pPr>
+            <a:r>
+              <a:rPr lang="en-AU" altLang="en-US" sz="1400"/>
+              <a:t>Kappa  0.19960 0.0005324 88 374.8752  0.0000</a:t>
+            </a:r>
+          </a:p>
+          <a:p>
+            <a:pPr eaLnBrk="1" hangingPunct="1">
+              <a:spcBef>
+                <a:spcPct val="0"/>
+              </a:spcBef>
+              <a:buClrTx/>
+              <a:buSzTx/>
+              <a:buFontTx/>
+              <a:buNone/>
+            </a:pPr>
+            <a:r>
+              <a:rPr lang="en-AU" altLang="en-US" sz="1400"/>
+              <a:t>Tzero -0.00453 0.0040570 88  -1.1176  0.2668</a:t>
+            </a:r>
+          </a:p>
+          <a:p>
+            <a:pPr eaLnBrk="1" hangingPunct="1">
+              <a:spcBef>
+                <a:spcPct val="0"/>
+              </a:spcBef>
+              <a:buClrTx/>
+              <a:buSzTx/>
+              <a:buFontTx/>
+              <a:buNone/>
+            </a:pPr>
+            <a:r>
+              <a:rPr lang="en-AU" altLang="en-US" sz="1400"/>
+              <a:t> Correlation: </a:t>
+            </a:r>
+          </a:p>
+          <a:p>
+            <a:pPr eaLnBrk="1" hangingPunct="1">
+              <a:spcBef>
+                <a:spcPct val="0"/>
+              </a:spcBef>
+              <a:buClrTx/>
+              <a:buSzTx/>
+              <a:buFontTx/>
+              <a:buNone/>
+            </a:pPr>
+            <a:r>
+              <a:rPr lang="en-AU" altLang="en-US" sz="1400"/>
+              <a:t>      Linf   Kappa </a:t>
+            </a:r>
+          </a:p>
+          <a:p>
+            <a:pPr eaLnBrk="1" hangingPunct="1">
+              <a:spcBef>
+                <a:spcPct val="0"/>
+              </a:spcBef>
+              <a:buClrTx/>
+              <a:buSzTx/>
+              <a:buFontTx/>
+              <a:buNone/>
+            </a:pPr>
+            <a:r>
+              <a:rPr lang="en-AU" altLang="en-US" sz="1400"/>
+              <a:t>Kappa -0.034       </a:t>
+            </a:r>
+          </a:p>
+          <a:p>
+            <a:pPr eaLnBrk="1" hangingPunct="1">
+              <a:spcBef>
+                <a:spcPct val="0"/>
+              </a:spcBef>
+              <a:buClrTx/>
+              <a:buSzTx/>
+              <a:buFontTx/>
+              <a:buNone/>
+            </a:pPr>
+            <a:r>
+              <a:rPr lang="en-AU" altLang="en-US" sz="1400"/>
+              <a:t>Tzero -0.027  0.876</a:t>
+            </a:r>
+          </a:p>
+          <a:p>
+            <a:pPr eaLnBrk="1" hangingPunct="1">
+              <a:spcBef>
+                <a:spcPct val="0"/>
+              </a:spcBef>
+              <a:buClrTx/>
+              <a:buSzTx/>
+              <a:buFontTx/>
+              <a:buNone/>
+            </a:pPr>
+            <a:endParaRPr lang="en-AU" altLang="en-US" sz="1400"/>
+          </a:p>
+        </p:txBody>
+      </p:sp>
+    </p:spTree>
+    <p:extLst>
+      <p:ext uri="{BB962C8B-B14F-4D97-AF65-F5344CB8AC3E}">
+        <p14:creationId xmlns:p14="http://schemas.microsoft.com/office/powerpoint/2010/main" val="874184991"/>
       </p:ext>
     </p:extLst>
   </p:cSld>

--- a/Day3_MixedModels_ModelSelection/FW536_Day3_Morning_mixed effects_nosoln_accessible.pptx
+++ b/Day3_MixedModels_ModelSelection/FW536_Day3_Morning_mixed effects_nosoln_accessible.pptx
@@ -258,7 +258,7 @@
           <a:p>
             <a:fld id="{D2867A0E-DA56-0A4B-83A5-F520947CDB62}" type="datetimeFigureOut">
               <a:rPr lang="en-US" smtClean="0"/>
-              <a:t>7/16/26</a:t>
+              <a:t>9/1/26</a:t>
             </a:fld>
             <a:endParaRPr lang="en-US"/>
           </a:p>
@@ -676,7 +676,7 @@
               </a14:hiddenLine>
             </a:ext>
             <a:ext uri="{FAA26D3D-D897-4be2-8F04-BA451C77F1D7}">
-              <ma14:placeholderFlag xmlns:ma14="http://schemas.microsoft.com/office/mac/drawingml/2011/main" xmlns="" val="1"/>
+              <ma14:placeholderFlag xmlns="" xmlns:ma14="http://schemas.microsoft.com/office/mac/drawingml/2011/main" val="1"/>
             </a:ext>
           </a:extLst>
         </p:spPr>
@@ -765,7 +765,7 @@
               </a14:hiddenLine>
             </a:ext>
             <a:ext uri="{FAA26D3D-D897-4be2-8F04-BA451C77F1D7}">
-              <ma14:placeholderFlag xmlns:ma14="http://schemas.microsoft.com/office/mac/drawingml/2011/main" xmlns="" val="1"/>
+              <ma14:placeholderFlag xmlns="" xmlns:ma14="http://schemas.microsoft.com/office/mac/drawingml/2011/main" val="1"/>
             </a:ext>
           </a:extLst>
         </p:spPr>
@@ -854,7 +854,7 @@
               </a14:hiddenLine>
             </a:ext>
             <a:ext uri="{FAA26D3D-D897-4be2-8F04-BA451C77F1D7}">
-              <ma14:placeholderFlag xmlns:ma14="http://schemas.microsoft.com/office/mac/drawingml/2011/main" xmlns="" val="1"/>
+              <ma14:placeholderFlag xmlns="" xmlns:ma14="http://schemas.microsoft.com/office/mac/drawingml/2011/main" val="1"/>
             </a:ext>
           </a:extLst>
         </p:spPr>
@@ -943,7 +943,7 @@
               </a14:hiddenLine>
             </a:ext>
             <a:ext uri="{FAA26D3D-D897-4be2-8F04-BA451C77F1D7}">
-              <ma14:placeholderFlag xmlns:ma14="http://schemas.microsoft.com/office/mac/drawingml/2011/main" xmlns="" val="1"/>
+              <ma14:placeholderFlag xmlns="" xmlns:ma14="http://schemas.microsoft.com/office/mac/drawingml/2011/main" val="1"/>
             </a:ext>
           </a:extLst>
         </p:spPr>
@@ -1032,7 +1032,7 @@
               </a14:hiddenLine>
             </a:ext>
             <a:ext uri="{FAA26D3D-D897-4be2-8F04-BA451C77F1D7}">
-              <ma14:placeholderFlag xmlns:ma14="http://schemas.microsoft.com/office/mac/drawingml/2011/main" xmlns="" val="1"/>
+              <ma14:placeholderFlag xmlns="" xmlns:ma14="http://schemas.microsoft.com/office/mac/drawingml/2011/main" val="1"/>
             </a:ext>
           </a:extLst>
         </p:spPr>
@@ -1160,7 +1160,7 @@
               </a14:hiddenLine>
             </a:ext>
             <a:ext uri="{FAA26D3D-D897-4be2-8F04-BA451C77F1D7}">
-              <ma14:placeholderFlag xmlns:ma14="http://schemas.microsoft.com/office/mac/drawingml/2011/main" xmlns="" val="1"/>
+              <ma14:placeholderFlag xmlns="" xmlns:ma14="http://schemas.microsoft.com/office/mac/drawingml/2011/main" val="1"/>
             </a:ext>
           </a:extLst>
         </p:spPr>
@@ -1249,7 +1249,7 @@
               </a14:hiddenLine>
             </a:ext>
             <a:ext uri="{FAA26D3D-D897-4be2-8F04-BA451C77F1D7}">
-              <ma14:placeholderFlag xmlns:ma14="http://schemas.microsoft.com/office/mac/drawingml/2011/main" xmlns="" val="1"/>
+              <ma14:placeholderFlag xmlns="" xmlns:ma14="http://schemas.microsoft.com/office/mac/drawingml/2011/main" val="1"/>
             </a:ext>
           </a:extLst>
         </p:spPr>
@@ -1338,7 +1338,7 @@
               </a14:hiddenLine>
             </a:ext>
             <a:ext uri="{FAA26D3D-D897-4be2-8F04-BA451C77F1D7}">
-              <ma14:placeholderFlag xmlns:ma14="http://schemas.microsoft.com/office/mac/drawingml/2011/main" xmlns="" val="1"/>
+              <ma14:placeholderFlag xmlns="" xmlns:ma14="http://schemas.microsoft.com/office/mac/drawingml/2011/main" val="1"/>
             </a:ext>
           </a:extLst>
         </p:spPr>
@@ -1427,7 +1427,7 @@
               </a14:hiddenLine>
             </a:ext>
             <a:ext uri="{FAA26D3D-D897-4be2-8F04-BA451C77F1D7}">
-              <ma14:placeholderFlag xmlns:ma14="http://schemas.microsoft.com/office/mac/drawingml/2011/main" xmlns="" val="1"/>
+              <ma14:placeholderFlag xmlns="" xmlns:ma14="http://schemas.microsoft.com/office/mac/drawingml/2011/main" val="1"/>
             </a:ext>
           </a:extLst>
         </p:spPr>
@@ -1516,7 +1516,7 @@
               </a14:hiddenLine>
             </a:ext>
             <a:ext uri="{FAA26D3D-D897-4be2-8F04-BA451C77F1D7}">
-              <ma14:placeholderFlag xmlns:ma14="http://schemas.microsoft.com/office/mac/drawingml/2011/main" xmlns="" val="1"/>
+              <ma14:placeholderFlag xmlns="" xmlns:ma14="http://schemas.microsoft.com/office/mac/drawingml/2011/main" val="1"/>
             </a:ext>
           </a:extLst>
         </p:spPr>
@@ -1605,7 +1605,7 @@
               </a14:hiddenLine>
             </a:ext>
             <a:ext uri="{FAA26D3D-D897-4be2-8F04-BA451C77F1D7}">
-              <ma14:placeholderFlag xmlns:ma14="http://schemas.microsoft.com/office/mac/drawingml/2011/main" xmlns="" val="1"/>
+              <ma14:placeholderFlag xmlns="" xmlns:ma14="http://schemas.microsoft.com/office/mac/drawingml/2011/main" val="1"/>
             </a:ext>
           </a:extLst>
         </p:spPr>
@@ -1694,7 +1694,7 @@
               </a14:hiddenLine>
             </a:ext>
             <a:ext uri="{FAA26D3D-D897-4be2-8F04-BA451C77F1D7}">
-              <ma14:placeholderFlag xmlns:ma14="http://schemas.microsoft.com/office/mac/drawingml/2011/main" xmlns="" val="1"/>
+              <ma14:placeholderFlag xmlns="" xmlns:ma14="http://schemas.microsoft.com/office/mac/drawingml/2011/main" val="1"/>
             </a:ext>
           </a:extLst>
         </p:spPr>
@@ -1783,7 +1783,7 @@
               </a14:hiddenLine>
             </a:ext>
             <a:ext uri="{FAA26D3D-D897-4be2-8F04-BA451C77F1D7}">
-              <ma14:placeholderFlag xmlns:ma14="http://schemas.microsoft.com/office/mac/drawingml/2011/main" xmlns="" val="1"/>
+              <ma14:placeholderFlag xmlns="" xmlns:ma14="http://schemas.microsoft.com/office/mac/drawingml/2011/main" val="1"/>
             </a:ext>
           </a:extLst>
         </p:spPr>
@@ -1872,7 +1872,7 @@
               </a14:hiddenLine>
             </a:ext>
             <a:ext uri="{FAA26D3D-D897-4be2-8F04-BA451C77F1D7}">
-              <ma14:placeholderFlag xmlns:ma14="http://schemas.microsoft.com/office/mac/drawingml/2011/main" xmlns="" val="1"/>
+              <ma14:placeholderFlag xmlns="" xmlns:ma14="http://schemas.microsoft.com/office/mac/drawingml/2011/main" val="1"/>
             </a:ext>
           </a:extLst>
         </p:spPr>
@@ -2140,7 +2140,7 @@
               </a14:hiddenLine>
             </a:ext>
             <a:ext uri="{FAA26D3D-D897-4be2-8F04-BA451C77F1D7}">
-              <ma14:placeholderFlag xmlns:ma14="http://schemas.microsoft.com/office/mac/drawingml/2011/main" xmlns="" val="1"/>
+              <ma14:placeholderFlag xmlns="" xmlns:ma14="http://schemas.microsoft.com/office/mac/drawingml/2011/main" val="1"/>
             </a:ext>
           </a:extLst>
         </p:spPr>
@@ -2229,7 +2229,7 @@
               </a14:hiddenLine>
             </a:ext>
             <a:ext uri="{FAA26D3D-D897-4be2-8F04-BA451C77F1D7}">
-              <ma14:placeholderFlag xmlns:ma14="http://schemas.microsoft.com/office/mac/drawingml/2011/main" xmlns="" val="1"/>
+              <ma14:placeholderFlag xmlns="" xmlns:ma14="http://schemas.microsoft.com/office/mac/drawingml/2011/main" val="1"/>
             </a:ext>
           </a:extLst>
         </p:spPr>
@@ -2318,7 +2318,7 @@
               </a14:hiddenLine>
             </a:ext>
             <a:ext uri="{FAA26D3D-D897-4be2-8F04-BA451C77F1D7}">
-              <ma14:placeholderFlag xmlns:ma14="http://schemas.microsoft.com/office/mac/drawingml/2011/main" xmlns="" val="1"/>
+              <ma14:placeholderFlag xmlns="" xmlns:ma14="http://schemas.microsoft.com/office/mac/drawingml/2011/main" val="1"/>
             </a:ext>
           </a:extLst>
         </p:spPr>
@@ -2407,7 +2407,7 @@
               </a14:hiddenLine>
             </a:ext>
             <a:ext uri="{FAA26D3D-D897-4be2-8F04-BA451C77F1D7}">
-              <ma14:placeholderFlag xmlns:ma14="http://schemas.microsoft.com/office/mac/drawingml/2011/main" xmlns="" val="1"/>
+              <ma14:placeholderFlag xmlns="" xmlns:ma14="http://schemas.microsoft.com/office/mac/drawingml/2011/main" val="1"/>
             </a:ext>
           </a:extLst>
         </p:spPr>
@@ -2496,7 +2496,7 @@
               </a14:hiddenLine>
             </a:ext>
             <a:ext uri="{FAA26D3D-D897-4be2-8F04-BA451C77F1D7}">
-              <ma14:placeholderFlag xmlns:ma14="http://schemas.microsoft.com/office/mac/drawingml/2011/main" xmlns="" val="1"/>
+              <ma14:placeholderFlag xmlns="" xmlns:ma14="http://schemas.microsoft.com/office/mac/drawingml/2011/main" val="1"/>
             </a:ext>
           </a:extLst>
         </p:spPr>
@@ -2585,7 +2585,7 @@
               </a14:hiddenLine>
             </a:ext>
             <a:ext uri="{FAA26D3D-D897-4be2-8F04-BA451C77F1D7}">
-              <ma14:placeholderFlag xmlns:ma14="http://schemas.microsoft.com/office/mac/drawingml/2011/main" xmlns="" val="1"/>
+              <ma14:placeholderFlag xmlns="" xmlns:ma14="http://schemas.microsoft.com/office/mac/drawingml/2011/main" val="1"/>
             </a:ext>
           </a:extLst>
         </p:spPr>
@@ -2674,7 +2674,7 @@
               </a14:hiddenLine>
             </a:ext>
             <a:ext uri="{FAA26D3D-D897-4be2-8F04-BA451C77F1D7}">
-              <ma14:placeholderFlag xmlns:ma14="http://schemas.microsoft.com/office/mac/drawingml/2011/main" xmlns="" val="1"/>
+              <ma14:placeholderFlag xmlns="" xmlns:ma14="http://schemas.microsoft.com/office/mac/drawingml/2011/main" val="1"/>
             </a:ext>
           </a:extLst>
         </p:spPr>
@@ -2763,7 +2763,7 @@
               </a14:hiddenLine>
             </a:ext>
             <a:ext uri="{FAA26D3D-D897-4be2-8F04-BA451C77F1D7}">
-              <ma14:placeholderFlag xmlns:ma14="http://schemas.microsoft.com/office/mac/drawingml/2011/main" xmlns="" val="1"/>
+              <ma14:placeholderFlag xmlns="" xmlns:ma14="http://schemas.microsoft.com/office/mac/drawingml/2011/main" val="1"/>
             </a:ext>
           </a:extLst>
         </p:spPr>
@@ -2852,7 +2852,7 @@
               </a14:hiddenLine>
             </a:ext>
             <a:ext uri="{FAA26D3D-D897-4be2-8F04-BA451C77F1D7}">
-              <ma14:placeholderFlag xmlns:ma14="http://schemas.microsoft.com/office/mac/drawingml/2011/main" xmlns="" val="1"/>
+              <ma14:placeholderFlag xmlns="" xmlns:ma14="http://schemas.microsoft.com/office/mac/drawingml/2011/main" val="1"/>
             </a:ext>
           </a:extLst>
         </p:spPr>
@@ -2941,7 +2941,7 @@
               </a14:hiddenLine>
             </a:ext>
             <a:ext uri="{FAA26D3D-D897-4be2-8F04-BA451C77F1D7}">
-              <ma14:placeholderFlag xmlns:ma14="http://schemas.microsoft.com/office/mac/drawingml/2011/main" xmlns="" val="1"/>
+              <ma14:placeholderFlag xmlns="" xmlns:ma14="http://schemas.microsoft.com/office/mac/drawingml/2011/main" val="1"/>
             </a:ext>
           </a:extLst>
         </p:spPr>
@@ -3030,7 +3030,7 @@
               </a14:hiddenLine>
             </a:ext>
             <a:ext uri="{FAA26D3D-D897-4be2-8F04-BA451C77F1D7}">
-              <ma14:placeholderFlag xmlns:ma14="http://schemas.microsoft.com/office/mac/drawingml/2011/main" xmlns="" val="1"/>
+              <ma14:placeholderFlag xmlns="" xmlns:ma14="http://schemas.microsoft.com/office/mac/drawingml/2011/main" val="1"/>
             </a:ext>
           </a:extLst>
         </p:spPr>
@@ -3119,7 +3119,7 @@
               </a14:hiddenLine>
             </a:ext>
             <a:ext uri="{FAA26D3D-D897-4be2-8F04-BA451C77F1D7}">
-              <ma14:placeholderFlag xmlns:ma14="http://schemas.microsoft.com/office/mac/drawingml/2011/main" xmlns="" val="1"/>
+              <ma14:placeholderFlag xmlns="" xmlns:ma14="http://schemas.microsoft.com/office/mac/drawingml/2011/main" val="1"/>
             </a:ext>
           </a:extLst>
         </p:spPr>
@@ -3208,7 +3208,7 @@
               </a14:hiddenLine>
             </a:ext>
             <a:ext uri="{FAA26D3D-D897-4be2-8F04-BA451C77F1D7}">
-              <ma14:placeholderFlag xmlns:ma14="http://schemas.microsoft.com/office/mac/drawingml/2011/main" xmlns="" val="1"/>
+              <ma14:placeholderFlag xmlns="" xmlns:ma14="http://schemas.microsoft.com/office/mac/drawingml/2011/main" val="1"/>
             </a:ext>
           </a:extLst>
         </p:spPr>
@@ -3297,7 +3297,7 @@
               </a14:hiddenLine>
             </a:ext>
             <a:ext uri="{FAA26D3D-D897-4be2-8F04-BA451C77F1D7}">
-              <ma14:placeholderFlag xmlns:ma14="http://schemas.microsoft.com/office/mac/drawingml/2011/main" xmlns="" val="1"/>
+              <ma14:placeholderFlag xmlns="" xmlns:ma14="http://schemas.microsoft.com/office/mac/drawingml/2011/main" val="1"/>
             </a:ext>
           </a:extLst>
         </p:spPr>
@@ -3386,7 +3386,7 @@
               </a14:hiddenLine>
             </a:ext>
             <a:ext uri="{FAA26D3D-D897-4be2-8F04-BA451C77F1D7}">
-              <ma14:placeholderFlag xmlns:ma14="http://schemas.microsoft.com/office/mac/drawingml/2011/main" xmlns="" val="1"/>
+              <ma14:placeholderFlag xmlns="" xmlns:ma14="http://schemas.microsoft.com/office/mac/drawingml/2011/main" val="1"/>
             </a:ext>
           </a:extLst>
         </p:spPr>
@@ -3475,7 +3475,7 @@
               </a14:hiddenLine>
             </a:ext>
             <a:ext uri="{FAA26D3D-D897-4be2-8F04-BA451C77F1D7}">
-              <ma14:placeholderFlag xmlns:ma14="http://schemas.microsoft.com/office/mac/drawingml/2011/main" xmlns="" val="1"/>
+              <ma14:placeholderFlag xmlns="" xmlns:ma14="http://schemas.microsoft.com/office/mac/drawingml/2011/main" val="1"/>
             </a:ext>
           </a:extLst>
         </p:spPr>
@@ -3564,7 +3564,7 @@
               </a14:hiddenLine>
             </a:ext>
             <a:ext uri="{FAA26D3D-D897-4be2-8F04-BA451C77F1D7}">
-              <ma14:placeholderFlag xmlns:ma14="http://schemas.microsoft.com/office/mac/drawingml/2011/main" xmlns="" val="1"/>
+              <ma14:placeholderFlag xmlns="" xmlns:ma14="http://schemas.microsoft.com/office/mac/drawingml/2011/main" val="1"/>
             </a:ext>
           </a:extLst>
         </p:spPr>
@@ -3653,7 +3653,7 @@
               </a14:hiddenLine>
             </a:ext>
             <a:ext uri="{FAA26D3D-D897-4be2-8F04-BA451C77F1D7}">
-              <ma14:placeholderFlag xmlns:ma14="http://schemas.microsoft.com/office/mac/drawingml/2011/main" xmlns="" val="1"/>
+              <ma14:placeholderFlag xmlns="" xmlns:ma14="http://schemas.microsoft.com/office/mac/drawingml/2011/main" val="1"/>
             </a:ext>
           </a:extLst>
         </p:spPr>
@@ -3742,7 +3742,7 @@
               </a14:hiddenLine>
             </a:ext>
             <a:ext uri="{FAA26D3D-D897-4be2-8F04-BA451C77F1D7}">
-              <ma14:placeholderFlag xmlns:ma14="http://schemas.microsoft.com/office/mac/drawingml/2011/main" xmlns="" val="1"/>
+              <ma14:placeholderFlag xmlns="" xmlns:ma14="http://schemas.microsoft.com/office/mac/drawingml/2011/main" val="1"/>
             </a:ext>
           </a:extLst>
         </p:spPr>
@@ -3831,7 +3831,7 @@
               </a14:hiddenLine>
             </a:ext>
             <a:ext uri="{FAA26D3D-D897-4be2-8F04-BA451C77F1D7}">
-              <ma14:placeholderFlag xmlns:ma14="http://schemas.microsoft.com/office/mac/drawingml/2011/main" xmlns="" val="1"/>
+              <ma14:placeholderFlag xmlns="" xmlns:ma14="http://schemas.microsoft.com/office/mac/drawingml/2011/main" val="1"/>
             </a:ext>
           </a:extLst>
         </p:spPr>
@@ -3920,7 +3920,7 @@
               </a14:hiddenLine>
             </a:ext>
             <a:ext uri="{FAA26D3D-D897-4be2-8F04-BA451C77F1D7}">
-              <ma14:placeholderFlag xmlns:ma14="http://schemas.microsoft.com/office/mac/drawingml/2011/main" xmlns="" val="1"/>
+              <ma14:placeholderFlag xmlns="" xmlns:ma14="http://schemas.microsoft.com/office/mac/drawingml/2011/main" val="1"/>
             </a:ext>
           </a:extLst>
         </p:spPr>
@@ -4009,7 +4009,7 @@
               </a14:hiddenLine>
             </a:ext>
             <a:ext uri="{FAA26D3D-D897-4be2-8F04-BA451C77F1D7}">
-              <ma14:placeholderFlag xmlns:ma14="http://schemas.microsoft.com/office/mac/drawingml/2011/main" xmlns="" val="1"/>
+              <ma14:placeholderFlag xmlns="" xmlns:ma14="http://schemas.microsoft.com/office/mac/drawingml/2011/main" val="1"/>
             </a:ext>
           </a:extLst>
         </p:spPr>
@@ -4165,7 +4165,7 @@
           <a:p>
             <a:fld id="{6A7D9F0D-27CC-AF49-BE27-075EF3FD3399}" type="datetimeFigureOut">
               <a:rPr lang="en-US" smtClean="0"/>
-              <a:t>7/16/26</a:t>
+              <a:t>9/1/26</a:t>
             </a:fld>
             <a:endParaRPr lang="en-US"/>
           </a:p>
@@ -4333,7 +4333,7 @@
           <a:p>
             <a:fld id="{6A7D9F0D-27CC-AF49-BE27-075EF3FD3399}" type="datetimeFigureOut">
               <a:rPr lang="en-US" smtClean="0"/>
-              <a:t>7/16/26</a:t>
+              <a:t>9/1/26</a:t>
             </a:fld>
             <a:endParaRPr lang="en-US"/>
           </a:p>
@@ -4511,7 +4511,7 @@
           <a:p>
             <a:fld id="{6A7D9F0D-27CC-AF49-BE27-075EF3FD3399}" type="datetimeFigureOut">
               <a:rPr lang="en-US" smtClean="0"/>
-              <a:t>7/16/26</a:t>
+              <a:t>9/1/26</a:t>
             </a:fld>
             <a:endParaRPr lang="en-US"/>
           </a:p>
@@ -5582,7 +5582,7 @@
           <a:p>
             <a:fld id="{6A7D9F0D-27CC-AF49-BE27-075EF3FD3399}" type="datetimeFigureOut">
               <a:rPr lang="en-US" smtClean="0"/>
-              <a:t>7/16/26</a:t>
+              <a:t>9/1/26</a:t>
             </a:fld>
             <a:endParaRPr lang="en-US"/>
           </a:p>
@@ -5827,7 +5827,7 @@
           <a:p>
             <a:fld id="{6A7D9F0D-27CC-AF49-BE27-075EF3FD3399}" type="datetimeFigureOut">
               <a:rPr lang="en-US" smtClean="0"/>
-              <a:t>7/16/26</a:t>
+              <a:t>9/1/26</a:t>
             </a:fld>
             <a:endParaRPr lang="en-US"/>
           </a:p>
@@ -6056,7 +6056,7 @@
           <a:p>
             <a:fld id="{6A7D9F0D-27CC-AF49-BE27-075EF3FD3399}" type="datetimeFigureOut">
               <a:rPr lang="en-US" smtClean="0"/>
-              <a:t>7/16/26</a:t>
+              <a:t>9/1/26</a:t>
             </a:fld>
             <a:endParaRPr lang="en-US"/>
           </a:p>
@@ -6420,7 +6420,7 @@
           <a:p>
             <a:fld id="{6A7D9F0D-27CC-AF49-BE27-075EF3FD3399}" type="datetimeFigureOut">
               <a:rPr lang="en-US" smtClean="0"/>
-              <a:t>7/16/26</a:t>
+              <a:t>9/1/26</a:t>
             </a:fld>
             <a:endParaRPr lang="en-US"/>
           </a:p>
@@ -6537,7 +6537,7 @@
           <a:p>
             <a:fld id="{6A7D9F0D-27CC-AF49-BE27-075EF3FD3399}" type="datetimeFigureOut">
               <a:rPr lang="en-US" smtClean="0"/>
-              <a:t>7/16/26</a:t>
+              <a:t>9/1/26</a:t>
             </a:fld>
             <a:endParaRPr lang="en-US"/>
           </a:p>
@@ -6632,7 +6632,7 @@
           <a:p>
             <a:fld id="{6A7D9F0D-27CC-AF49-BE27-075EF3FD3399}" type="datetimeFigureOut">
               <a:rPr lang="en-US" smtClean="0"/>
-              <a:t>7/16/26</a:t>
+              <a:t>9/1/26</a:t>
             </a:fld>
             <a:endParaRPr lang="en-US"/>
           </a:p>
@@ -6907,7 +6907,7 @@
           <a:p>
             <a:fld id="{6A7D9F0D-27CC-AF49-BE27-075EF3FD3399}" type="datetimeFigureOut">
               <a:rPr lang="en-US" smtClean="0"/>
-              <a:t>7/16/26</a:t>
+              <a:t>9/1/26</a:t>
             </a:fld>
             <a:endParaRPr lang="en-US"/>
           </a:p>
@@ -7159,7 +7159,7 @@
           <a:p>
             <a:fld id="{6A7D9F0D-27CC-AF49-BE27-075EF3FD3399}" type="datetimeFigureOut">
               <a:rPr lang="en-US" smtClean="0"/>
-              <a:t>7/16/26</a:t>
+              <a:t>9/1/26</a:t>
             </a:fld>
             <a:endParaRPr lang="en-US"/>
           </a:p>
@@ -7370,7 +7370,7 @@
           <a:p>
             <a:fld id="{6A7D9F0D-27CC-AF49-BE27-075EF3FD3399}" type="datetimeFigureOut">
               <a:rPr lang="en-US" smtClean="0"/>
-              <a:t>7/16/26</a:t>
+              <a:t>9/1/26</a:t>
             </a:fld>
             <a:endParaRPr lang="en-US"/>
           </a:p>
@@ -15943,8 +15943,13 @@
             </a:pPr>
             <a:r>
               <a:rPr lang="en-US" dirty="0"/>
-              <a:t>Can also do both species and length</a:t>
-            </a:r>
+              <a:t>Can also do both species </a:t>
+            </a:r>
+            <a:r>
+              <a:rPr lang="en-US"/>
+              <a:t>and lake</a:t>
+            </a:r>
+            <a:endParaRPr lang="en-US" dirty="0"/>
           </a:p>
           <a:p>
             <a:pPr lvl="1">
